--- a/Files/Proprsal.pptx
+++ b/Files/Proprsal.pptx
@@ -376,7 +376,7 @@
           <a:p>
             <a:fld id="{9184DA70-C731-4C70-880D-CCD4705E623C}" type="datetime1">
               <a:rPr lang="en-US" smtClean="0"/>
-              <a:t>6/10/2020</a:t>
+              <a:t>7/12/2020</a:t>
             </a:fld>
             <a:endParaRPr lang="en-US" dirty="0"/>
           </a:p>
@@ -564,7 +564,7 @@
           <a:p>
             <a:fld id="{B612A279-0833-481D-8C56-F67FD0AC6C50}" type="datetime1">
               <a:rPr lang="en-US" smtClean="0"/>
-              <a:t>6/10/2020</a:t>
+              <a:t>7/12/2020</a:t>
             </a:fld>
             <a:endParaRPr lang="en-US" dirty="0"/>
           </a:p>
@@ -806,7 +806,7 @@
           <a:p>
             <a:fld id="{6587DA83-5663-4C9C-B9AA-0B40A3DAFF81}" type="datetime1">
               <a:rPr lang="en-US" smtClean="0"/>
-              <a:t>6/10/2020</a:t>
+              <a:t>7/12/2020</a:t>
             </a:fld>
             <a:endParaRPr lang="en-US" dirty="0"/>
           </a:p>
@@ -994,7 +994,7 @@
           <a:p>
             <a:fld id="{4BE1D723-8F53-4F53-90B0-1982A396982E}" type="datetime1">
               <a:rPr lang="en-US" smtClean="0"/>
-              <a:t>6/10/2020</a:t>
+              <a:t>7/12/2020</a:t>
             </a:fld>
             <a:endParaRPr lang="en-US" dirty="0"/>
           </a:p>
@@ -1367,7 +1367,7 @@
           <a:p>
             <a:fld id="{97669AF7-7BEB-44E4-9852-375E34362B5B}" type="datetime1">
               <a:rPr lang="en-US" smtClean="0"/>
-              <a:t>6/10/2020</a:t>
+              <a:t>7/12/2020</a:t>
             </a:fld>
             <a:endParaRPr lang="en-US" dirty="0"/>
           </a:p>
@@ -1622,7 +1622,7 @@
           <a:p>
             <a:fld id="{BAAAC38D-0552-4C82-B593-E6124DFADBE2}" type="datetime1">
               <a:rPr lang="en-US" smtClean="0"/>
-              <a:t>6/10/2020</a:t>
+              <a:t>7/12/2020</a:t>
             </a:fld>
             <a:endParaRPr lang="en-US" dirty="0"/>
           </a:p>
@@ -2019,7 +2019,7 @@
           <a:p>
             <a:fld id="{D9DF0F1C-5577-4ACB-BB62-DF8F3C494C7E}" type="datetime1">
               <a:rPr lang="en-US" smtClean="0"/>
-              <a:t>6/10/2020</a:t>
+              <a:t>7/12/2020</a:t>
             </a:fld>
             <a:endParaRPr lang="en-US" dirty="0"/>
           </a:p>
@@ -2155,7 +2155,7 @@
           <a:p>
             <a:fld id="{1775B394-D9F9-4F0C-B15D-605F45CB9E9F}" type="datetime1">
               <a:rPr lang="en-US" smtClean="0"/>
-              <a:t>6/10/2020</a:t>
+              <a:t>7/12/2020</a:t>
             </a:fld>
             <a:endParaRPr lang="en-US" dirty="0"/>
           </a:p>
@@ -2312,7 +2312,7 @@
           <a:p>
             <a:fld id="{39667345-2558-425A-8533-9BFDBCE15005}" type="datetime1">
               <a:rPr lang="en-US" smtClean="0"/>
-              <a:t>6/10/2020</a:t>
+              <a:t>7/12/2020</a:t>
             </a:fld>
             <a:endParaRPr lang="en-US" dirty="0"/>
           </a:p>
@@ -2641,7 +2641,7 @@
           <a:p>
             <a:fld id="{92BEA474-078D-4E9B-9B14-09A87B19DC46}" type="datetime1">
               <a:rPr lang="en-US" smtClean="0"/>
-              <a:t>6/10/2020</a:t>
+              <a:t>7/12/2020</a:t>
             </a:fld>
             <a:endParaRPr lang="en-US" dirty="0"/>
           </a:p>
@@ -2991,7 +2991,7 @@
           <a:p>
             <a:fld id="{4907D986-8816-4272-A432-0437A28A9828}" type="datetime1">
               <a:rPr lang="en-US" smtClean="0"/>
-              <a:t>6/10/2020</a:t>
+              <a:t>7/12/2020</a:t>
             </a:fld>
             <a:endParaRPr lang="en-US" dirty="0"/>
           </a:p>
@@ -3252,7 +3252,7 @@
           <a:p>
             <a:fld id="{62D6E202-B606-4609-B914-27C9371A1F6D}" type="datetime1">
               <a:rPr lang="en-US" smtClean="0"/>
-              <a:t>6/10/2020</a:t>
+              <a:t>7/12/2020</a:t>
             </a:fld>
             <a:endParaRPr lang="en-US" dirty="0"/>
           </a:p>
@@ -4936,7 +4936,7 @@
         <p:spPr/>
         <p:txBody>
           <a:bodyPr>
-            <a:normAutofit lnSpcReduction="10000"/>
+            <a:normAutofit/>
           </a:bodyPr>
           <a:lstStyle/>
           <a:p>
@@ -4998,6 +4998,20 @@
               </a:rPr>
               <a:t>Jurnal</a:t>
             </a:r>
+            <a:r>
+              <a:rPr lang="en-US" sz="2400" dirty="0">
+                <a:latin typeface="Times New Roman" panose="02020603050405020304" pitchFamily="18" charset="0"/>
+                <a:cs typeface="Times New Roman" panose="02020603050405020304" pitchFamily="18" charset="0"/>
+              </a:rPr>
+              <a:t>/</a:t>
+            </a:r>
+            <a:r>
+              <a:rPr lang="en-US" sz="2400" dirty="0" err="1">
+                <a:latin typeface="Times New Roman" panose="02020603050405020304" pitchFamily="18" charset="0"/>
+                <a:cs typeface="Times New Roman" panose="02020603050405020304" pitchFamily="18" charset="0"/>
+              </a:rPr>
+              <a:t>Artikel</a:t>
+            </a:r>
             <a:endParaRPr lang="en-US" sz="2400" dirty="0">
               <a:latin typeface="Times New Roman" panose="02020603050405020304" pitchFamily="18" charset="0"/>
               <a:cs typeface="Times New Roman" panose="02020603050405020304" pitchFamily="18" charset="0"/>
@@ -5009,16 +5023,12 @@
               <a:buChar char="•"/>
             </a:pPr>
             <a:r>
-              <a:rPr lang="en-US" sz="2400" dirty="0" err="1">
-                <a:latin typeface="Times New Roman" panose="02020603050405020304" pitchFamily="18" charset="0"/>
-                <a:cs typeface="Times New Roman" panose="02020603050405020304" pitchFamily="18" charset="0"/>
-              </a:rPr>
-              <a:t>Artikel</a:t>
-            </a:r>
-            <a:endParaRPr lang="en-US" sz="2400" dirty="0">
-              <a:latin typeface="Times New Roman" panose="02020603050405020304" pitchFamily="18" charset="0"/>
-              <a:cs typeface="Times New Roman" panose="02020603050405020304" pitchFamily="18" charset="0"/>
-            </a:endParaRPr>
+              <a:rPr lang="en-US" sz="2400" i="1" dirty="0">
+                <a:latin typeface="Times New Roman" panose="02020603050405020304" pitchFamily="18" charset="0"/>
+                <a:cs typeface="Times New Roman" panose="02020603050405020304" pitchFamily="18" charset="0"/>
+              </a:rPr>
+              <a:t>Datasheet</a:t>
+            </a:r>
           </a:p>
           <a:p>
             <a:pPr marL="2511425" indent="-357188">
@@ -5030,7 +5040,7 @@
                 <a:latin typeface="Times New Roman" panose="02020603050405020304" pitchFamily="18" charset="0"/>
                 <a:cs typeface="Times New Roman" panose="02020603050405020304" pitchFamily="18" charset="0"/>
               </a:rPr>
-              <a:t>Datasheet</a:t>
+              <a:t>Manual book</a:t>
             </a:r>
           </a:p>
           <a:p>
@@ -5039,19 +5049,6 @@
               <a:buChar char="•"/>
             </a:pPr>
             <a:r>
-              <a:rPr lang="en-US" sz="2400" i="1" dirty="0">
-                <a:latin typeface="Times New Roman" panose="02020603050405020304" pitchFamily="18" charset="0"/>
-                <a:cs typeface="Times New Roman" panose="02020603050405020304" pitchFamily="18" charset="0"/>
-              </a:rPr>
-              <a:t>Manual book</a:t>
-            </a:r>
-          </a:p>
-          <a:p>
-            <a:pPr marL="2511425" indent="-357188">
-              <a:buFont typeface="Arial" panose="020B0604020202020204" pitchFamily="34" charset="0"/>
-              <a:buChar char="•"/>
-            </a:pPr>
-            <a:r>
               <a:rPr lang="en-US" sz="2400" dirty="0" err="1">
                 <a:latin typeface="Times New Roman" panose="02020603050405020304" pitchFamily="18" charset="0"/>
                 <a:cs typeface="Times New Roman" panose="02020603050405020304" pitchFamily="18" charset="0"/>
@@ -5071,6 +5068,20 @@
                 <a:cs typeface="Times New Roman" panose="02020603050405020304" pitchFamily="18" charset="0"/>
               </a:rPr>
               <a:t>sejenis</a:t>
+            </a:r>
+            <a:r>
+              <a:rPr lang="en-US" sz="2400" dirty="0">
+                <a:latin typeface="Times New Roman" panose="02020603050405020304" pitchFamily="18" charset="0"/>
+                <a:cs typeface="Times New Roman" panose="02020603050405020304" pitchFamily="18" charset="0"/>
+              </a:rPr>
+              <a:t> </a:t>
+            </a:r>
+            <a:r>
+              <a:rPr lang="en-US" sz="2400" dirty="0" err="1">
+                <a:latin typeface="Times New Roman" panose="02020603050405020304" pitchFamily="18" charset="0"/>
+                <a:cs typeface="Times New Roman" panose="02020603050405020304" pitchFamily="18" charset="0"/>
+              </a:rPr>
+              <a:t>Terkait</a:t>
             </a:r>
             <a:endParaRPr lang="id-ID" sz="2400" dirty="0">
               <a:latin typeface="Times New Roman" panose="02020603050405020304" pitchFamily="18" charset="0"/>
@@ -5399,7 +5410,7 @@
           <a:graphicData uri="http://schemas.openxmlformats.org/presentationml/2006/ole">
             <mc:AlternateContent xmlns:mc="http://schemas.openxmlformats.org/markup-compatibility/2006">
               <mc:Choice xmlns:v="urn:schemas-microsoft-com:vml" Requires="v">
-                <p:oleObj spid="_x0000_s2064" name="Visio" r:id="rId3" imgW="6410171" imgH="9820439" progId="Visio.Drawing.15">
+                <p:oleObj spid="_x0000_s2068" name="Visio" r:id="rId3" imgW="6410171" imgH="9820439" progId="Visio.Drawing.15">
                   <p:embed/>
                 </p:oleObj>
               </mc:Choice>
@@ -5820,7 +5831,7 @@
           <a:graphicData uri="http://schemas.openxmlformats.org/presentationml/2006/ole">
             <mc:AlternateContent xmlns:mc="http://schemas.openxmlformats.org/markup-compatibility/2006">
               <mc:Choice xmlns:v="urn:schemas-microsoft-com:vml" Requires="v">
-                <p:oleObj spid="_x0000_s3143" name="Visio" r:id="rId3" imgW="2467006" imgH="7038811" progId="Visio.Drawing.15">
+                <p:oleObj spid="_x0000_s3163" name="Visio" r:id="rId3" imgW="2467006" imgH="7038811" progId="Visio.Drawing.15">
                   <p:embed/>
                 </p:oleObj>
               </mc:Choice>
@@ -5956,7 +5967,7 @@
           <a:graphicData uri="http://schemas.openxmlformats.org/presentationml/2006/ole">
             <mc:AlternateContent xmlns:mc="http://schemas.openxmlformats.org/markup-compatibility/2006">
               <mc:Choice xmlns:v="urn:schemas-microsoft-com:vml" Requires="v">
-                <p:oleObj spid="_x0000_s3144" name="Visio" r:id="rId5" imgW="1847542" imgH="6829425" progId="Visio.Drawing.15">
+                <p:oleObj spid="_x0000_s3164" name="Visio" r:id="rId5" imgW="1847542" imgH="6829425" progId="Visio.Drawing.15">
                   <p:embed/>
                 </p:oleObj>
               </mc:Choice>
@@ -6101,7 +6112,7 @@
           <a:graphicData uri="http://schemas.openxmlformats.org/presentationml/2006/ole">
             <mc:AlternateContent xmlns:mc="http://schemas.openxmlformats.org/markup-compatibility/2006">
               <mc:Choice xmlns:v="urn:schemas-microsoft-com:vml" Requires="v">
-                <p:oleObj spid="_x0000_s3145" name="Visio" r:id="rId7" imgW="2781177" imgH="7848764" progId="Visio.Drawing.15">
+                <p:oleObj spid="_x0000_s3165" name="Visio" r:id="rId7" imgW="2781177" imgH="7848764" progId="Visio.Drawing.15">
                   <p:embed/>
                 </p:oleObj>
               </mc:Choice>
@@ -6252,7 +6263,7 @@
           <a:graphicData uri="http://schemas.openxmlformats.org/presentationml/2006/ole">
             <mc:AlternateContent xmlns:mc="http://schemas.openxmlformats.org/markup-compatibility/2006">
               <mc:Choice xmlns:v="urn:schemas-microsoft-com:vml" Requires="v">
-                <p:oleObj spid="_x0000_s3146" name="Visio" r:id="rId9" imgW="3457359" imgH="10287000" progId="Visio.Drawing.15">
+                <p:oleObj spid="_x0000_s3166" name="Visio" r:id="rId9" imgW="3457359" imgH="10287000" progId="Visio.Drawing.15">
                   <p:embed/>
                 </p:oleObj>
               </mc:Choice>
@@ -6403,7 +6414,7 @@
           <a:graphicData uri="http://schemas.openxmlformats.org/presentationml/2006/ole">
             <mc:AlternateContent xmlns:mc="http://schemas.openxmlformats.org/markup-compatibility/2006">
               <mc:Choice xmlns:v="urn:schemas-microsoft-com:vml" Requires="v">
-                <p:oleObj spid="_x0000_s3147" name="Visio" r:id="rId11" imgW="2429029" imgH="9191789" progId="Visio.Drawing.15">
+                <p:oleObj spid="_x0000_s3167" name="Visio" r:id="rId11" imgW="2429029" imgH="9191789" progId="Visio.Drawing.15">
                   <p:embed/>
                 </p:oleObj>
               </mc:Choice>
